--- a/slides/slide_06.pptx
+++ b/slides/slide_06.pptx
@@ -26,61 +26,38 @@
       <p:bold r:id="rId9"/>
     </p:embeddedFont>
     <p:embeddedFont>
-      <p:font typeface="Bebas Neue" panose="020B0606020202050201" pitchFamily="2" charset="0"/>
+      <p:font typeface="Hanken Grotesk" panose="020B0604020202020204" charset="0"/>
       <p:regular r:id="rId10"/>
-    </p:embeddedFont>
-    <p:embeddedFont>
-      <p:font typeface="DM Mono" panose="020B0509040201040103" pitchFamily="1" charset="0"/>
-      <p:regular r:id="rId11"/>
+      <p:bold r:id="rId11"/>
       <p:italic r:id="rId12"/>
-    </p:embeddedFont>
-    <p:embeddedFont>
-      <p:font typeface="Hanken Grotesk" panose="020B0604020202020204" charset="0"/>
-      <p:regular r:id="rId13"/>
-      <p:bold r:id="rId14"/>
-      <p:italic r:id="rId15"/>
-      <p:boldItalic r:id="rId16"/>
-    </p:embeddedFont>
-    <p:embeddedFont>
-      <p:font typeface="Open Sans" panose="020B0606030504020204" pitchFamily="2" charset="0"/>
-      <p:regular r:id="rId17"/>
-      <p:bold r:id="rId18"/>
-      <p:italic r:id="rId19"/>
-      <p:boldItalic r:id="rId20"/>
+      <p:boldItalic r:id="rId13"/>
     </p:embeddedFont>
     <p:embeddedFont>
       <p:font typeface="Raleway" pitchFamily="2" charset="0"/>
-      <p:regular r:id="rId21"/>
-      <p:bold r:id="rId22"/>
-      <p:italic r:id="rId23"/>
-      <p:boldItalic r:id="rId24"/>
+      <p:regular r:id="rId14"/>
+      <p:bold r:id="rId15"/>
+      <p:italic r:id="rId16"/>
+      <p:boldItalic r:id="rId17"/>
     </p:embeddedFont>
     <p:embeddedFont>
       <p:font typeface="Raleway Black" pitchFamily="2" charset="0"/>
-      <p:bold r:id="rId25"/>
-      <p:boldItalic r:id="rId26"/>
+      <p:bold r:id="rId18"/>
+      <p:boldItalic r:id="rId19"/>
     </p:embeddedFont>
     <p:embeddedFont>
       <p:font typeface="Raleway ExtraBold" pitchFamily="2" charset="0"/>
-      <p:bold r:id="rId27"/>
-      <p:boldItalic r:id="rId28"/>
+      <p:bold r:id="rId20"/>
+      <p:boldItalic r:id="rId21"/>
     </p:embeddedFont>
     <p:embeddedFont>
       <p:font typeface="Roboto Medium" panose="02000000000000000000" pitchFamily="2" charset="0"/>
-      <p:regular r:id="rId29"/>
-      <p:italic r:id="rId30"/>
+      <p:regular r:id="rId22"/>
+      <p:italic r:id="rId23"/>
     </p:embeddedFont>
     <p:embeddedFont>
       <p:font typeface="Roboto" panose="02000000000000000000" pitchFamily="2"/>
-      <p:bold r:id="rId31"/>
-      <p:boldItalic r:id="rId32"/>
-    </p:embeddedFont>
-    <p:embeddedFont>
-      <p:font typeface="Segoe UI" panose="020B0502040204020203" pitchFamily="2" charset="0"/>
-      <p:regular r:id="rId33"/>
-      <p:bold r:id="rId34"/>
-      <p:italic r:id="rId35"/>
-      <p:boldItalic r:id="rId36"/>
+      <p:bold r:id="rId24"/>
+      <p:boldItalic r:id="rId25"/>
     </p:embeddedFont>
   </p:embeddedFontLst>
   <p:custDataLst>
@@ -884,7 +861,7 @@
           <a:bodyPr/>
           <a:lstStyle/>
           <a:p>
-            <a:fld id="{FF327EAA-453C-4145-8B67-CEA5124BDF4F}" type="datetimeFigureOut">
+            <a:fld id="{6E02C343-12EC-4FAF-A817-1BDD366B2B04}" type="datetimeFigureOut">
               <a:rPr lang="en-US" smtClean="0"/>
               <a:t>11/7/2009</a:t>
             </a:fld>
@@ -1048,7 +1025,7 @@
           <a:bodyPr/>
           <a:lstStyle/>
           <a:p>
-            <a:fld id="{6A625844-4B29-49F7-A458-50AC2FA4A4BD}" type="datetimeFigureOut">
+            <a:fld id="{117B5865-26D6-4BBB-BD5A-D335E671A04A}" type="datetimeFigureOut">
               <a:rPr lang="en-US" smtClean="0"/>
               <a:t>11/7/2009</a:t>
             </a:fld>
@@ -1212,7 +1189,7 @@
           <a:bodyPr/>
           <a:lstStyle/>
           <a:p>
-            <a:fld id="{69F12D16-70BB-4297-BC8A-19BE44B6F734}" type="datetimeFigureOut">
+            <a:fld id="{C52AA680-E93A-4AB1-9CCD-B5255FB047E3}" type="datetimeFigureOut">
               <a:rPr lang="en-US" smtClean="0"/>
               <a:t>11/7/2009</a:t>
             </a:fld>
@@ -13117,7 +13094,7 @@
           <a:bodyPr/>
           <a:lstStyle/>
           <a:p>
-            <a:fld id="{73FD3093-00AE-4823-8D70-72D1851EF8C5}" type="datetimeFigureOut">
+            <a:fld id="{E6E7E8B3-FB4A-4730-BAA3-5B9ECBB54870}" type="datetimeFigureOut">
               <a:rPr lang="en-US" smtClean="0"/>
               <a:t>11/7/2009</a:t>
             </a:fld>
@@ -33218,7 +33195,7 @@
           <a:bodyPr/>
           <a:lstStyle/>
           <a:p>
-            <a:fld id="{FC2B1135-6834-4586-94D1-C999BCDC59FF}" type="datetimeFigureOut">
+            <a:fld id="{AF0829B9-3BE9-4726-8E5C-BD24719F3C27}" type="datetimeFigureOut">
               <a:rPr lang="en-US" smtClean="0"/>
               <a:t>11/7/2009</a:t>
             </a:fld>
@@ -38865,7 +38842,7 @@
           <a:bodyPr/>
           <a:lstStyle/>
           <a:p>
-            <a:fld id="{B7D252E1-49B6-45EA-A90C-58C613EA78EF}" type="datetimeFigureOut">
+            <a:fld id="{5851892A-E010-4403-BFB1-4B937D122B0B}" type="datetimeFigureOut">
               <a:rPr lang="en-US" smtClean="0"/>
               <a:t>11/7/2009</a:t>
             </a:fld>
@@ -39254,7 +39231,7 @@
           <a:bodyPr/>
           <a:lstStyle/>
           <a:p>
-            <a:fld id="{A5F66B64-862D-4F51-9617-6191088C5BFD}" type="datetimeFigureOut">
+            <a:fld id="{DF80B6C1-AC43-4C48-804E-D4D068D6AA3F}" type="datetimeFigureOut">
               <a:rPr lang="en-US" smtClean="0"/>
               <a:t>11/7/2009</a:t>
             </a:fld>
@@ -39367,7 +39344,7 @@
           <a:bodyPr/>
           <a:lstStyle/>
           <a:p>
-            <a:fld id="{94F42197-BABB-48A2-80CA-745E8BB56FC8}" type="datetimeFigureOut">
+            <a:fld id="{ACB3953F-22BE-40B5-A634-636A990016FE}" type="datetimeFigureOut">
               <a:rPr lang="en-US" smtClean="0"/>
               <a:t>11/7/2009</a:t>
             </a:fld>
@@ -39457,7 +39434,7 @@
           <a:bodyPr/>
           <a:lstStyle/>
           <a:p>
-            <a:fld id="{F4AA67FE-A62E-4305-A1FA-D36654C6AE34}" type="datetimeFigureOut">
+            <a:fld id="{43E47A67-9E23-4D36-AD25-9764B51D6F6E}" type="datetimeFigureOut">
               <a:rPr lang="en-US" smtClean="0"/>
               <a:t>11/7/2009</a:t>
             </a:fld>
@@ -39712,7 +39689,7 @@
           <a:bodyPr/>
           <a:lstStyle/>
           <a:p>
-            <a:fld id="{0039249A-39E9-435B-BEE8-C56B3D42482C}" type="datetimeFigureOut">
+            <a:fld id="{BDBF6351-B58C-4157-A52E-BC8EC8BF9F8E}" type="datetimeFigureOut">
               <a:rPr lang="en-US" smtClean="0"/>
               <a:t>11/7/2009</a:t>
             </a:fld>
@@ -39944,7 +39921,7 @@
           <a:bodyPr/>
           <a:lstStyle/>
           <a:p>
-            <a:fld id="{64851994-8BD7-4623-9D72-AA5E95403B57}" type="datetimeFigureOut">
+            <a:fld id="{4C10EFD6-03EC-4B02-8A7F-1418B0A95CA7}" type="datetimeFigureOut">
               <a:rPr lang="en-US" smtClean="0"/>
               <a:t>11/7/2009</a:t>
             </a:fld>
@@ -41804,16 +41781,20 @@
           <a:lstStyle/>
           <a:p>
             <a:r>
-              <a:rPr lang="en">
+              <a:rPr lang="en" b="1">
                 <a:solidFill>
                   <a:srgbClr val="FFFFFF"/>
                 </a:solidFill>
+                <a:latin typeface="Arial"/>
                 <a:ea typeface="Open Sans"/>
-                <a:cs typeface="Open Sans"/>
+                <a:cs typeface="Arial"/>
               </a:rPr>
               <a:t>[КЛЮЧЕВЫЕ ТЕЗИСЫ / ПРЕИМУЩЕСТВА]</a:t>
             </a:r>
-            <a:endParaRPr lang="ru-RU"/>
+            <a:endParaRPr lang="ru-RU" b="1">
+              <a:latin typeface="Arial"/>
+              <a:cs typeface="Arial"/>
+            </a:endParaRPr>
           </a:p>
         </p:txBody>
       </p:sp>
@@ -41848,15 +41829,13 @@
                 <a:solidFill>
                   <a:srgbClr val="FFFFFF"/>
                 </a:solidFill>
+                <a:latin typeface="Arial"/>
+                <a:cs typeface="Arial"/>
               </a:rPr>
               <a:t>[Кратко опишите вашу мысль, рекомендацию или преимущество в 2–3 предложениях]</a:t>
             </a:r>
             <a:br>
-              <a:rPr lang="en">
-                <a:solidFill>
-                  <a:srgbClr val="FFFFFF"/>
-                </a:solidFill>
-              </a:rPr>
+              <a:rPr lang="en"/>
             </a:br>
             <a:endParaRPr lang="en"/>
           </a:p>
@@ -41889,7 +41868,10 @@
           <a:p>
             <a:pPr marL="0" indent="0"/>
             <a:r>
-              <a:rPr lang="en"/>
+              <a:rPr lang="en">
+                <a:latin typeface="Arial"/>
+                <a:cs typeface="Arial"/>
+              </a:rPr>
               <a:t>[Кратко опишите вашу мысль, рекомендацию или преимущество в 2–3 предложениях]</a:t>
             </a:r>
             <a:br>
@@ -41926,7 +41908,10 @@
           <a:p>
             <a:pPr marL="0" indent="0"/>
             <a:r>
-              <a:rPr lang="en"/>
+              <a:rPr lang="en">
+                <a:latin typeface="Arial"/>
+                <a:cs typeface="Arial"/>
+              </a:rPr>
               <a:t>[Кратко опишите вашу мысль, рекомендацию или преимущество в 2–3 предложениях]</a:t>
             </a:r>
             <a:br>
@@ -41963,7 +41948,10 @@
           <a:p>
             <a:pPr marL="0" indent="0"/>
             <a:r>
-              <a:rPr lang="en"/>
+              <a:rPr lang="en">
+                <a:latin typeface="Arial"/>
+                <a:cs typeface="Arial"/>
+              </a:rPr>
               <a:t>[Кратко опишите вашу мысль, рекомендацию или преимущество в 2–3 предложениях]</a:t>
             </a:r>
             <a:br>
@@ -42000,14 +41988,19 @@
           <a:p>
             <a:pPr marL="0" indent="0"/>
             <a:r>
-              <a:rPr lang="en">
+              <a:rPr lang="en" b="1">
                 <a:solidFill>
                   <a:srgbClr val="FFFFFF"/>
                 </a:solidFill>
+                <a:latin typeface="Arial"/>
+                <a:cs typeface="Arial"/>
               </a:rPr>
               <a:t>[ЗАГОЛОВОК]</a:t>
             </a:r>
-            <a:endParaRPr lang="ru-RU"/>
+            <a:endParaRPr lang="ru-RU">
+              <a:latin typeface="Arial"/>
+              <a:cs typeface="Arial"/>
+            </a:endParaRPr>
           </a:p>
         </p:txBody>
       </p:sp>
@@ -42038,7 +42031,10 @@
           <a:p>
             <a:pPr marL="0" indent="0"/>
             <a:r>
-              <a:rPr lang="en"/>
+              <a:rPr lang="en" b="1">
+                <a:latin typeface="Arial"/>
+                <a:cs typeface="Arial"/>
+              </a:rPr>
               <a:t>[ЗАГОЛОВОК]</a:t>
             </a:r>
           </a:p>
@@ -42079,10 +42075,16 @@
               <a:buNone/>
             </a:pPr>
             <a:r>
-              <a:rPr lang="en"/>
+              <a:rPr lang="en" b="1">
+                <a:latin typeface="Arial"/>
+                <a:cs typeface="Arial"/>
+              </a:rPr>
               <a:t>[ЗАГОЛОВОК]</a:t>
             </a:r>
-            <a:endParaRPr lang="ru-RU"/>
+            <a:endParaRPr lang="ru-RU">
+              <a:latin typeface="Arial"/>
+              <a:cs typeface="Arial"/>
+            </a:endParaRPr>
           </a:p>
         </p:txBody>
       </p:sp>
@@ -42113,7 +42115,10 @@
           <a:p>
             <a:pPr marL="0" indent="0"/>
             <a:r>
-              <a:rPr lang="en"/>
+              <a:rPr lang="en">
+                <a:latin typeface="Arial"/>
+                <a:cs typeface="Arial"/>
+              </a:rPr>
               <a:t>[Кратко опишите вашу мысль, рекомендацию или преимущество в 2–3 предложениях]</a:t>
             </a:r>
             <a:br>
@@ -42150,7 +42155,10 @@
           <a:p>
             <a:pPr marL="0" indent="0"/>
             <a:r>
-              <a:rPr lang="en"/>
+              <a:rPr lang="en">
+                <a:latin typeface="Arial"/>
+                <a:cs typeface="Arial"/>
+              </a:rPr>
               <a:t>[Кратко опишите вашу мысль, рекомендацию или преимущество в 2–3 предложениях]</a:t>
             </a:r>
             <a:br>
@@ -42195,10 +42203,16 @@
               <a:buNone/>
             </a:pPr>
             <a:r>
-              <a:rPr lang="en"/>
+              <a:rPr lang="en" b="1">
+                <a:latin typeface="Arial"/>
+                <a:cs typeface="Arial"/>
+              </a:rPr>
               <a:t>[ЗАГОЛОВОК]</a:t>
             </a:r>
-            <a:endParaRPr lang="ru-RU"/>
+            <a:endParaRPr lang="ru-RU" b="1">
+              <a:latin typeface="Arial"/>
+              <a:cs typeface="Arial"/>
+            </a:endParaRPr>
           </a:p>
         </p:txBody>
       </p:sp>
@@ -42237,10 +42251,16 @@
               <a:buNone/>
             </a:pPr>
             <a:r>
-              <a:rPr lang="en"/>
+              <a:rPr lang="en" b="1">
+                <a:latin typeface="Arial"/>
+                <a:cs typeface="Arial"/>
+              </a:rPr>
               <a:t>[ЗАГОЛОВОК]</a:t>
             </a:r>
-            <a:endParaRPr lang="ru-RU"/>
+            <a:endParaRPr lang="ru-RU">
+              <a:latin typeface="Arial"/>
+              <a:cs typeface="Arial"/>
+            </a:endParaRPr>
           </a:p>
         </p:txBody>
       </p:sp>
@@ -42279,10 +42299,16 @@
               <a:buNone/>
             </a:pPr>
             <a:r>
-              <a:rPr lang="en"/>
+              <a:rPr lang="en" b="1">
+                <a:latin typeface="Arial"/>
+                <a:cs typeface="Arial"/>
+              </a:rPr>
               <a:t>[ЗАГОЛОВОК]</a:t>
             </a:r>
-            <a:endParaRPr lang="ru-RU"/>
+            <a:endParaRPr lang="ru-RU" b="1">
+              <a:latin typeface="Arial"/>
+              <a:cs typeface="Arial"/>
+            </a:endParaRPr>
           </a:p>
         </p:txBody>
       </p:sp>

--- a/slides/slide_06.pptx
+++ b/slides/slide_06.pptx
@@ -861,7 +861,7 @@
           <a:bodyPr/>
           <a:lstStyle/>
           <a:p>
-            <a:fld id="{6E02C343-12EC-4FAF-A817-1BDD366B2B04}" type="datetimeFigureOut">
+            <a:fld id="{0F8BA2F9-93B7-4322-BBC9-A5DF3EC6E85F}" type="datetimeFigureOut">
               <a:rPr lang="en-US" smtClean="0"/>
               <a:t>11/7/2009</a:t>
             </a:fld>
@@ -1025,7 +1025,7 @@
           <a:bodyPr/>
           <a:lstStyle/>
           <a:p>
-            <a:fld id="{117B5865-26D6-4BBB-BD5A-D335E671A04A}" type="datetimeFigureOut">
+            <a:fld id="{CA23A3F7-9234-43E6-9C0D-532F11476526}" type="datetimeFigureOut">
               <a:rPr lang="en-US" smtClean="0"/>
               <a:t>11/7/2009</a:t>
             </a:fld>
@@ -1189,7 +1189,7 @@
           <a:bodyPr/>
           <a:lstStyle/>
           <a:p>
-            <a:fld id="{C52AA680-E93A-4AB1-9CCD-B5255FB047E3}" type="datetimeFigureOut">
+            <a:fld id="{671219E3-7BA1-477B-8B7E-CA604A543EAE}" type="datetimeFigureOut">
               <a:rPr lang="en-US" smtClean="0"/>
               <a:t>11/7/2009</a:t>
             </a:fld>
@@ -13094,7 +13094,7 @@
           <a:bodyPr/>
           <a:lstStyle/>
           <a:p>
-            <a:fld id="{E6E7E8B3-FB4A-4730-BAA3-5B9ECBB54870}" type="datetimeFigureOut">
+            <a:fld id="{EBE5E5C0-19FA-4ECB-B504-2B07BC5C2462}" type="datetimeFigureOut">
               <a:rPr lang="en-US" smtClean="0"/>
               <a:t>11/7/2009</a:t>
             </a:fld>
@@ -33195,7 +33195,7 @@
           <a:bodyPr/>
           <a:lstStyle/>
           <a:p>
-            <a:fld id="{AF0829B9-3BE9-4726-8E5C-BD24719F3C27}" type="datetimeFigureOut">
+            <a:fld id="{5D4E648F-0F71-4A5A-897A-656AA9B91DE2}" type="datetimeFigureOut">
               <a:rPr lang="en-US" smtClean="0"/>
               <a:t>11/7/2009</a:t>
             </a:fld>
@@ -38842,7 +38842,7 @@
           <a:bodyPr/>
           <a:lstStyle/>
           <a:p>
-            <a:fld id="{5851892A-E010-4403-BFB1-4B937D122B0B}" type="datetimeFigureOut">
+            <a:fld id="{F2E61E28-3D46-430F-8EBD-D6E56DDBA61E}" type="datetimeFigureOut">
               <a:rPr lang="en-US" smtClean="0"/>
               <a:t>11/7/2009</a:t>
             </a:fld>
@@ -39231,7 +39231,7 @@
           <a:bodyPr/>
           <a:lstStyle/>
           <a:p>
-            <a:fld id="{DF80B6C1-AC43-4C48-804E-D4D068D6AA3F}" type="datetimeFigureOut">
+            <a:fld id="{8557188A-66CC-4B16-90F6-5A7CCDBADDCF}" type="datetimeFigureOut">
               <a:rPr lang="en-US" smtClean="0"/>
               <a:t>11/7/2009</a:t>
             </a:fld>
@@ -39344,7 +39344,7 @@
           <a:bodyPr/>
           <a:lstStyle/>
           <a:p>
-            <a:fld id="{ACB3953F-22BE-40B5-A634-636A990016FE}" type="datetimeFigureOut">
+            <a:fld id="{F42DEFAF-0BF4-4B87-9EFB-07D21CF6A6A9}" type="datetimeFigureOut">
               <a:rPr lang="en-US" smtClean="0"/>
               <a:t>11/7/2009</a:t>
             </a:fld>
@@ -39434,7 +39434,7 @@
           <a:bodyPr/>
           <a:lstStyle/>
           <a:p>
-            <a:fld id="{43E47A67-9E23-4D36-AD25-9764B51D6F6E}" type="datetimeFigureOut">
+            <a:fld id="{AA6976DF-474D-4E92-8090-ACAC3CE33F1A}" type="datetimeFigureOut">
               <a:rPr lang="en-US" smtClean="0"/>
               <a:t>11/7/2009</a:t>
             </a:fld>
@@ -39689,7 +39689,7 @@
           <a:bodyPr/>
           <a:lstStyle/>
           <a:p>
-            <a:fld id="{BDBF6351-B58C-4157-A52E-BC8EC8BF9F8E}" type="datetimeFigureOut">
+            <a:fld id="{2FC03546-FE5E-4FDF-A355-112188546029}" type="datetimeFigureOut">
               <a:rPr lang="en-US" smtClean="0"/>
               <a:t>11/7/2009</a:t>
             </a:fld>
@@ -39921,7 +39921,7 @@
           <a:bodyPr/>
           <a:lstStyle/>
           <a:p>
-            <a:fld id="{4C10EFD6-03EC-4B02-8A7F-1418B0A95CA7}" type="datetimeFigureOut">
+            <a:fld id="{2A72092B-59FB-4965-9FA8-C7AF41CD48AC}" type="datetimeFigureOut">
               <a:rPr lang="en-US" smtClean="0"/>
               <a:t>11/7/2009</a:t>
             </a:fld>
